--- a/data/reports/2024_Annual_Report_ch.pdf.pptx
+++ b/data/reports/2024_Annual_Report_ch.pdf.pptx
@@ -11,6 +11,7 @@
     <p:sldId id="259" r:id="rId10"/>
     <p:sldId id="260" r:id="rId11"/>
     <p:sldId id="261" r:id="rId12"/>
+    <p:sldId id="262" r:id="rId13"/>
   </p:sldIdLst>
   <p:sldSz cx="9144000" cy="5143500" type="screen4x3"/>
   <p:notesSz cx="6858000" cy="9144000"/>
@@ -3269,7 +3270,7 @@
               </a:defRPr>
             </a:pPr>
             <a:r>
-              <a:t>April 26, 2026</a:t>
+              <a:t>May 07, 2026</a:t>
             </a:r>
           </a:p>
         </p:txBody>
@@ -3302,7 +3303,7 @@
               </a:defRPr>
             </a:pPr>
             <a:r>
-              <a:t>2026/04/26</a:t>
+              <a:t>2026/05/07</a:t>
             </a:r>
           </a:p>
         </p:txBody>
@@ -3550,7 +3551,7 @@
               </a:defRPr>
             </a:pPr>
             <a:r>
-              <a:t>• 監測摘要: 董事 ASUS TECHNOLOGY PTE LIMITED（代表人：Li, Yu-Lin） 375,000 100.00%；CHANNEL PILOT LIMITED 董事長 ASUS INTERNATIONAL LIMITED（代表人：施崇棠） 30,033,000 100.00%；遠智(香港)有限公司 董事 DYNALINK INTERNATIONAL CORP （代表人：雷漢文） 1,600,000 100.00%</a:t>
+              <a:t>• 監測摘要: CHANNEL PILOT LIMITED 董事長 ASUS INTERNATIONAL LIMITED（代表人：施崇棠） 30,033,000 100.00%；遠智(香港)有限公司 董事 DYNALINK INTERNATIONAL CORP （代表人：雷漢文） 1,600,000 100.00%；ASUS INTERNATIONAL LIMITED 董事長 華碩電腦（股）公司（代表人：施崇棠） 89,730,042 100.00%</a:t>
             </a:r>
           </a:p>
           <a:p>
@@ -3582,7 +3583,7 @@
               </a:defRPr>
             </a:pPr>
             <a:r>
-              <a:t>• 關鍵證據: 董事 ASUS TECHNOLOGY PTE LIMITED（代表人：Li, Yu-Lin） 375,000 100.00%</a:t>
+              <a:t>• 關鍵證據: 113/06/26 113/06/26 社團法人中華公司治理協會 董事會績效評估實務分享研討會(2024) 3小時</a:t>
             </a:r>
           </a:p>
           <a:p>
@@ -3631,7 +3632,7 @@
               </a:defRPr>
             </a:pPr>
             <a:r>
-              <a:t>2026/04/26</a:t>
+              <a:t>2026/05/07</a:t>
             </a:r>
           </a:p>
         </p:txBody>
@@ -3879,7 +3880,7 @@
               </a:defRPr>
             </a:pPr>
             <a:r>
-              <a:t>• 董事 ASUS TECHNOLOGY PTE LIMITED（代表人：Li, Yu-Lin） 375,000 100.00%；CHANNEL PILOT LIMITED 董事長 ASUS INTERNATIONAL LIMITED（代表人：施崇棠） 30,033,000 100.00%；遠智(香港)有限公司 董事 DYNALINK INTERNATIONAL CORP （代表人：雷漢文） 1,600,000 100.00%</a:t>
+              <a:t>• CHANNEL PILOT LIMITED 董事長 ASUS INTERNATIONAL LIMITED（代表人：施崇棠） 30,033,000 100.00%；遠智(香港)有限公司 董事 DYNALINK INTERNATIONAL CORP （代表人：雷漢文） 1,600,000 100.00%；ASUS INTERNATIONAL LIMITED 董事長 華碩電腦（股）公司（代表人：施崇棠） 89,730,042 100.00%</a:t>
             </a:r>
           </a:p>
         </p:txBody>
@@ -3912,7 +3913,7 @@
               </a:defRPr>
             </a:pPr>
             <a:r>
-              <a:t>2026/04/26</a:t>
+              <a:t>2026/05/07</a:t>
             </a:r>
           </a:p>
         </p:txBody>
@@ -4193,7 +4194,7 @@
               </a:defRPr>
             </a:pPr>
             <a:r>
-              <a:t>2026/04/26</a:t>
+              <a:t>2026/05/07</a:t>
             </a:r>
           </a:p>
         </p:txBody>
@@ -4441,7 +4442,7 @@
               </a:defRPr>
             </a:pPr>
             <a:r>
-              <a:t>• 董事 ASUS TECHNOLOGY PTE LIMITED（代表人：Li, Yu-Lin） 375,000 100.00%</a:t>
+              <a:t>• 113/06/26 113/06/26 社團法人中華公司治理協會 董事會績效評估實務分享研討會(2024) 3小時</a:t>
             </a:r>
           </a:p>
           <a:p>
@@ -4457,7 +4458,7 @@
               </a:defRPr>
             </a:pPr>
             <a:r>
-              <a:t>• 註二：兼任下列公司董事長：ASUS TECHNOLOGY PTE.</a:t>
+              <a:t>• 董事長 華碩電腦（股）公司（代表人：林福能） 19,000,000 100.00%</a:t>
             </a:r>
           </a:p>
           <a:p>
@@ -4473,7 +4474,7 @@
               </a:defRPr>
             </a:pPr>
             <a:r>
-              <a:t>• 113/06/26 113/06/26 社團法人中華公司治理協會 董事會績效評估實務分享研討會(2024) 3小時</a:t>
+              <a:t>• 董事長兼總經理 華碩電腦（股）公司（代表人：林成貴） 480,000,000 100.00%</a:t>
             </a:r>
           </a:p>
         </p:txBody>
@@ -4506,7 +4507,7 @@
               </a:defRPr>
             </a:pPr>
             <a:r>
-              <a:t>2026/04/26</a:t>
+              <a:t>2026/05/07</a:t>
             </a:r>
           </a:p>
         </p:txBody>
@@ -4819,7 +4820,7 @@
               </a:defRPr>
             </a:pPr>
             <a:r>
-              <a:t>2026/04/26</a:t>
+              <a:t>2026/05/07</a:t>
             </a:r>
           </a:p>
         </p:txBody>
@@ -4899,6 +4900,383 @@
             </a:pPr>
             <a:r>
               <a:t>6</a:t>
+            </a:r>
+          </a:p>
+        </p:txBody>
+      </p:sp>
+      <p:sp>
+        <p:nvSpPr>
+          <p:cNvPr id="8" name="TextBox 7"/>
+          <p:cNvSpPr txBox="1"/>
+          <p:nvPr/>
+        </p:nvSpPr>
+        <p:spPr>
+          <a:xfrm>
+            <a:off x="6858000" y="4869180"/>
+            <a:ext cx="1828800" cy="274320"/>
+          </a:xfrm>
+          <a:prstGeom prst="rect">
+            <a:avLst/>
+          </a:prstGeom>
+          <a:noFill/>
+        </p:spPr>
+        <p:txBody>
+          <a:bodyPr wrap="none">
+            <a:spAutoFit/>
+          </a:bodyPr>
+          <a:lstStyle/>
+          <a:p>
+            <a:pPr algn="r">
+              <a:defRPr sz="1200">
+                <a:latin typeface="Times New Roman"/>
+              </a:defRPr>
+            </a:pPr>
+            <a:r>
+              <a:t>Tax Monitor</a:t>
+            </a:r>
+          </a:p>
+        </p:txBody>
+      </p:sp>
+    </p:spTree>
+  </p:cSld>
+  <p:clrMapOvr>
+    <a:masterClrMapping/>
+  </p:clrMapOvr>
+</p:sld>
+</file>
+
+<file path=ppt/slides/slide7.xml><?xml version="1.0" encoding="utf-8"?>
+<p:sld xmlns:a="http://schemas.openxmlformats.org/drawingml/2006/main" xmlns:p="http://schemas.openxmlformats.org/presentationml/2006/main" xmlns:r="http://schemas.openxmlformats.org/officeDocument/2006/relationships">
+  <p:cSld>
+    <p:spTree>
+      <p:nvGrpSpPr>
+        <p:cNvPr id="1" name=""/>
+        <p:cNvGrpSpPr/>
+        <p:nvPr/>
+      </p:nvGrpSpPr>
+      <p:grpSpPr/>
+      <p:sp>
+        <p:nvSpPr>
+          <p:cNvPr id="2" name="Rectangle 1"/>
+          <p:cNvSpPr/>
+          <p:nvPr/>
+        </p:nvSpPr>
+        <p:spPr>
+          <a:xfrm>
+            <a:off x="0" y="0"/>
+            <a:ext cx="9144000" cy="648000"/>
+          </a:xfrm>
+          <a:prstGeom prst="rect">
+            <a:avLst/>
+          </a:prstGeom>
+          <a:solidFill>
+            <a:srgbClr val="2C3E6B"/>
+          </a:solidFill>
+          <a:ln>
+            <a:noFill/>
+          </a:ln>
+        </p:spPr>
+        <p:style>
+          <a:lnRef idx="1">
+            <a:schemeClr val="accent1"/>
+          </a:lnRef>
+          <a:fillRef idx="3">
+            <a:schemeClr val="accent1"/>
+          </a:fillRef>
+          <a:effectRef idx="2">
+            <a:schemeClr val="accent1"/>
+          </a:effectRef>
+          <a:fontRef idx="minor">
+            <a:schemeClr val="lt1"/>
+          </a:fontRef>
+        </p:style>
+        <p:txBody>
+          <a:bodyPr rtlCol="0" anchor="ctr"/>
+          <a:lstStyle/>
+          <a:p>
+            <a:pPr algn="ctr"/>
+          </a:p>
+        </p:txBody>
+      </p:sp>
+      <p:sp>
+        <p:nvSpPr>
+          <p:cNvPr id="3" name="TextBox 2"/>
+          <p:cNvSpPr txBox="1"/>
+          <p:nvPr/>
+        </p:nvSpPr>
+        <p:spPr>
+          <a:xfrm>
+            <a:off x="0" y="0"/>
+            <a:ext cx="9144000" cy="648000"/>
+          </a:xfrm>
+          <a:prstGeom prst="rect">
+            <a:avLst/>
+          </a:prstGeom>
+          <a:noFill/>
+        </p:spPr>
+        <p:txBody>
+          <a:bodyPr wrap="none" anchor="ctr" lIns="274320">
+            <a:spAutoFit/>
+          </a:bodyPr>
+          <a:lstStyle/>
+          <a:p>
+            <a:pPr algn="l">
+              <a:defRPr sz="3200" b="1">
+                <a:solidFill>
+                  <a:srgbClr val="FFFFFF"/>
+                </a:solidFill>
+                <a:latin typeface="Taipei Sans TC Beta"/>
+              </a:defRPr>
+            </a:pPr>
+            <a:r>
+              <a:t>資料來源 / Sources &amp; Citations</a:t>
+            </a:r>
+          </a:p>
+        </p:txBody>
+      </p:sp>
+      <p:sp>
+        <p:nvSpPr>
+          <p:cNvPr id="4" name="TextBox 3"/>
+          <p:cNvSpPr txBox="1"/>
+          <p:nvPr/>
+        </p:nvSpPr>
+        <p:spPr>
+          <a:xfrm>
+            <a:off x="457200" y="876600"/>
+            <a:ext cx="8229600" cy="3535380"/>
+          </a:xfrm>
+          <a:prstGeom prst="rect">
+            <a:avLst/>
+          </a:prstGeom>
+          <a:noFill/>
+        </p:spPr>
+        <p:txBody>
+          <a:bodyPr wrap="square">
+            <a:normAutofit/>
+          </a:bodyPr>
+          <a:lstStyle/>
+          <a:p>
+            <a:pPr>
+              <a:spcAft>
+                <a:spcPts val="1200"/>
+              </a:spcAft>
+              <a:defRPr sz="2200">
+                <a:solidFill>
+                  <a:srgbClr val="222C38"/>
+                </a:solidFill>
+                <a:latin typeface="Taipei Sans TC Beta"/>
+              </a:defRPr>
+            </a:pPr>
+            <a:r>
+              <a:t>• 原始文件 / Source title: 2024_Annual_Report_ch.pdf</a:t>
+            </a:r>
+          </a:p>
+          <a:p>
+            <a:pPr>
+              <a:spcAft>
+                <a:spcPts val="1200"/>
+              </a:spcAft>
+              <a:defRPr sz="2200">
+                <a:solidFill>
+                  <a:srgbClr val="222C38"/>
+                </a:solidFill>
+                <a:latin typeface="Taipei Sans TC Beta"/>
+              </a:defRPr>
+            </a:pPr>
+            <a:r>
+              <a:t>• 來源網址 / URL: https://www.asus.com/EVENT/Investor/Content/attachment/2024_Annual_Report_ch.pdf</a:t>
+            </a:r>
+          </a:p>
+          <a:p>
+            <a:pPr>
+              <a:spcAft>
+                <a:spcPts val="1200"/>
+              </a:spcAft>
+              <a:defRPr sz="2200">
+                <a:solidFill>
+                  <a:srgbClr val="222C38"/>
+                </a:solidFill>
+                <a:latin typeface="Taipei Sans TC Beta"/>
+              </a:defRPr>
+            </a:pPr>
+            <a:r>
+              <a:t>• 來源類型 / Source: pdf via all</a:t>
+            </a:r>
+          </a:p>
+          <a:p>
+            <a:pPr>
+              <a:spcAft>
+                <a:spcPts val="1200"/>
+              </a:spcAft>
+              <a:defRPr sz="2200">
+                <a:solidFill>
+                  <a:srgbClr val="222C38"/>
+                </a:solidFill>
+                <a:latin typeface="Taipei Sans TC Beta"/>
+              </a:defRPr>
+            </a:pPr>
+            <a:r>
+              <a:t>• 原文語言 / Original language: zh</a:t>
+            </a:r>
+          </a:p>
+          <a:p>
+            <a:pPr>
+              <a:spcAft>
+                <a:spcPts val="1200"/>
+              </a:spcAft>
+              <a:defRPr sz="2200">
+                <a:solidFill>
+                  <a:srgbClr val="222C38"/>
+                </a:solidFill>
+                <a:latin typeface="Taipei Sans TC Beta"/>
+              </a:defRPr>
+            </a:pPr>
+            <a:r>
+              <a:t>• 地區 / 產業: n/a · technology</a:t>
+            </a:r>
+          </a:p>
+          <a:p>
+            <a:pPr>
+              <a:spcAft>
+                <a:spcPts val="1200"/>
+              </a:spcAft>
+              <a:defRPr sz="2200">
+                <a:solidFill>
+                  <a:srgbClr val="222C38"/>
+                </a:solidFill>
+                <a:latin typeface="Taipei Sans TC Beta"/>
+              </a:defRPr>
+            </a:pPr>
+            <a:r>
+              <a:t>• 匯入時間 / Ingested at: 2026-05-07T18:06:10</a:t>
+            </a:r>
+          </a:p>
+          <a:p>
+            <a:pPr>
+              <a:spcAft>
+                <a:spcPts val="1200"/>
+              </a:spcAft>
+              <a:defRPr sz="2200">
+                <a:solidFill>
+                  <a:srgbClr val="222C38"/>
+                </a:solidFill>
+                <a:latin typeface="Taipei Sans TC Beta"/>
+              </a:defRPr>
+            </a:pPr>
+            <a:r>
+              <a:t>• 風險判斷 / Risk: Medium (audit, filing_obligation, compliance_change)</a:t>
+            </a:r>
+          </a:p>
+        </p:txBody>
+      </p:sp>
+      <p:sp>
+        <p:nvSpPr>
+          <p:cNvPr id="5" name="TextBox 4"/>
+          <p:cNvSpPr txBox="1"/>
+          <p:nvPr/>
+        </p:nvSpPr>
+        <p:spPr>
+          <a:xfrm>
+            <a:off x="457200" y="4869180"/>
+            <a:ext cx="1828800" cy="274320"/>
+          </a:xfrm>
+          <a:prstGeom prst="rect">
+            <a:avLst/>
+          </a:prstGeom>
+          <a:noFill/>
+        </p:spPr>
+        <p:txBody>
+          <a:bodyPr wrap="none">
+            <a:spAutoFit/>
+          </a:bodyPr>
+          <a:lstStyle/>
+          <a:p>
+            <a:pPr>
+              <a:defRPr sz="1200">
+                <a:latin typeface="Times New Roman"/>
+              </a:defRPr>
+            </a:pPr>
+            <a:r>
+              <a:t>2026/05/07</a:t>
+            </a:r>
+          </a:p>
+        </p:txBody>
+      </p:sp>
+      <p:sp>
+        <p:nvSpPr>
+          <p:cNvPr id="6" name="Rectangle 5"/>
+          <p:cNvSpPr/>
+          <p:nvPr/>
+        </p:nvSpPr>
+        <p:spPr>
+          <a:xfrm>
+            <a:off x="3841200" y="4927500"/>
+            <a:ext cx="1461599" cy="216000"/>
+          </a:xfrm>
+          <a:prstGeom prst="rect">
+            <a:avLst/>
+          </a:prstGeom>
+          <a:solidFill>
+            <a:srgbClr val="2C3E6B"/>
+          </a:solidFill>
+          <a:ln>
+            <a:noFill/>
+          </a:ln>
+        </p:spPr>
+        <p:style>
+          <a:lnRef idx="1">
+            <a:schemeClr val="accent1"/>
+          </a:lnRef>
+          <a:fillRef idx="3">
+            <a:schemeClr val="accent1"/>
+          </a:fillRef>
+          <a:effectRef idx="2">
+            <a:schemeClr val="accent1"/>
+          </a:effectRef>
+          <a:fontRef idx="minor">
+            <a:schemeClr val="lt1"/>
+          </a:fontRef>
+        </p:style>
+        <p:txBody>
+          <a:bodyPr rtlCol="0" anchor="ctr"/>
+          <a:lstStyle/>
+          <a:p>
+            <a:pPr algn="ctr"/>
+          </a:p>
+        </p:txBody>
+      </p:sp>
+      <p:sp>
+        <p:nvSpPr>
+          <p:cNvPr id="7" name="TextBox 6"/>
+          <p:cNvSpPr txBox="1"/>
+          <p:nvPr/>
+        </p:nvSpPr>
+        <p:spPr>
+          <a:xfrm>
+            <a:off x="3841200" y="4927500"/>
+            <a:ext cx="1461599" cy="216000"/>
+          </a:xfrm>
+          <a:prstGeom prst="rect">
+            <a:avLst/>
+          </a:prstGeom>
+          <a:noFill/>
+        </p:spPr>
+        <p:txBody>
+          <a:bodyPr wrap="none" anchor="ctr">
+            <a:spAutoFit/>
+          </a:bodyPr>
+          <a:lstStyle/>
+          <a:p>
+            <a:pPr algn="ctr">
+              <a:defRPr sz="1200">
+                <a:solidFill>
+                  <a:srgbClr val="FFFFFF"/>
+                </a:solidFill>
+                <a:latin typeface="Times New Roman"/>
+              </a:defRPr>
+            </a:pPr>
+            <a:r>
+              <a:t>7</a:t>
             </a:r>
           </a:p>
         </p:txBody>
